--- a/вкр/практика/презентация по_преддипломной_практике_Демьянцев_Виталий_Владиславович_606_22.pptx
+++ b/вкр/практика/презентация по_преддипломной_практике_Демьянцев_Виталий_Владиславович_606_22.pptx
@@ -228,7 +228,7 @@
           <a:p>
             <a:fld id="{07640263-EA9F-497A-96B0-1CCF8BC43BB1}" type="datetimeFigureOut">
               <a:rPr lang="ru-RU" smtClean="0"/>
-              <a:t>21.05.2026</a:t>
+              <a:t>22.05.2026</a:t>
             </a:fld>
             <a:endParaRPr lang="ru-RU"/>
           </a:p>
@@ -406,7 +406,7 @@
           <a:p>
             <a:fld id="{66574A11-D777-4A21-A270-6F8A09B2D137}" type="datetimeFigureOut">
               <a:rPr lang="ru-RU" smtClean="0"/>
-              <a:t>21.05.2026</a:t>
+              <a:t>22.05.2026</a:t>
             </a:fld>
             <a:endParaRPr lang="ru-RU"/>
           </a:p>
@@ -835,7 +835,7 @@
           <a:p>
             <a:fld id="{E916E196-4804-4F42-898A-0FC902D9B484}" type="datetime1">
               <a:rPr lang="ru-RU" smtClean="0"/>
-              <a:t>21.05.2026</a:t>
+              <a:t>22.05.2026</a:t>
             </a:fld>
             <a:endParaRPr lang="ru-RU"/>
           </a:p>
@@ -1065,7 +1065,7 @@
           <a:p>
             <a:fld id="{665369D4-ACF4-452B-B065-8EB5038972C3}" type="datetime1">
               <a:rPr lang="ru-RU" smtClean="0"/>
-              <a:t>21.05.2026</a:t>
+              <a:t>22.05.2026</a:t>
             </a:fld>
             <a:endParaRPr lang="ru-RU"/>
           </a:p>
@@ -1295,7 +1295,7 @@
           <a:p>
             <a:fld id="{51B40BE4-505E-422D-8FE2-7C14F619B5A8}" type="datetime1">
               <a:rPr lang="ru-RU" smtClean="0"/>
-              <a:t>21.05.2026</a:t>
+              <a:t>22.05.2026</a:t>
             </a:fld>
             <a:endParaRPr lang="ru-RU"/>
           </a:p>
@@ -1525,7 +1525,7 @@
           <a:p>
             <a:fld id="{303C7D8F-2A26-4A8C-918C-F8DEED5C5692}" type="datetime1">
               <a:rPr lang="ru-RU" smtClean="0"/>
-              <a:t>21.05.2026</a:t>
+              <a:t>22.05.2026</a:t>
             </a:fld>
             <a:endParaRPr lang="ru-RU"/>
           </a:p>
@@ -1836,7 +1836,7 @@
           <a:p>
             <a:fld id="{47F38BAD-298E-4C7C-BB8A-26FD3D33ECCE}" type="datetime1">
               <a:rPr lang="ru-RU" smtClean="0"/>
-              <a:t>21.05.2026</a:t>
+              <a:t>22.05.2026</a:t>
             </a:fld>
             <a:endParaRPr lang="ru-RU"/>
           </a:p>
@@ -2131,7 +2131,7 @@
           <a:p>
             <a:fld id="{4F74C74B-F198-4F1D-A85F-7D813148100B}" type="datetime1">
               <a:rPr lang="ru-RU" smtClean="0"/>
-              <a:t>21.05.2026</a:t>
+              <a:t>22.05.2026</a:t>
             </a:fld>
             <a:endParaRPr lang="ru-RU"/>
           </a:p>
@@ -2574,7 +2574,7 @@
           <a:p>
             <a:fld id="{2BB4B2F3-C8F7-4496-AB1D-5B712B52D4CC}" type="datetime1">
               <a:rPr lang="ru-RU" smtClean="0"/>
-              <a:t>21.05.2026</a:t>
+              <a:t>22.05.2026</a:t>
             </a:fld>
             <a:endParaRPr lang="ru-RU"/>
           </a:p>
@@ -2739,7 +2739,7 @@
           <a:p>
             <a:fld id="{69017ECC-D4AC-4388-A12E-1F5EBDCBE0DE}" type="datetime1">
               <a:rPr lang="ru-RU" smtClean="0"/>
-              <a:t>21.05.2026</a:t>
+              <a:t>22.05.2026</a:t>
             </a:fld>
             <a:endParaRPr lang="ru-RU"/>
           </a:p>
@@ -2868,7 +2868,7 @@
           <a:p>
             <a:fld id="{A7ABE4D9-AEC4-4B77-B4CC-7FBE63FE841C}" type="datetime1">
               <a:rPr lang="ru-RU" smtClean="0"/>
-              <a:t>21.05.2026</a:t>
+              <a:t>22.05.2026</a:t>
             </a:fld>
             <a:endParaRPr lang="ru-RU"/>
           </a:p>
@@ -3204,7 +3204,7 @@
           <a:p>
             <a:fld id="{21664E07-3D79-4A05-BB0B-898AD5671495}" type="datetime1">
               <a:rPr lang="ru-RU" smtClean="0"/>
-              <a:t>21.05.2026</a:t>
+              <a:t>22.05.2026</a:t>
             </a:fld>
             <a:endParaRPr lang="ru-RU"/>
           </a:p>
@@ -3517,7 +3517,7 @@
           <a:p>
             <a:fld id="{69552C21-0914-4B44-973B-AE86C28FD0CC}" type="datetime1">
               <a:rPr lang="ru-RU" smtClean="0"/>
-              <a:t>21.05.2026</a:t>
+              <a:t>22.05.2026</a:t>
             </a:fld>
             <a:endParaRPr lang="ru-RU"/>
           </a:p>
@@ -5642,7 +5642,7 @@
               <a:buNone/>
             </a:pPr>
             <a:r>
-              <a:rPr lang="ru-RU" sz="1800" dirty="0"/>
+              <a:rPr lang="ru-RU" sz="2000" dirty="0"/>
               <a:t>Цель: Разработать программную часть системы распознавания эмоций человека на основе ИНС с использованием методов компьютерного зрения и глубокого обучения.</a:t>
             </a:r>
           </a:p>
@@ -5657,7 +5657,7 @@
               <a:buNone/>
             </a:pPr>
             <a:r>
-              <a:rPr lang="ru-RU" sz="1800" dirty="0"/>
+              <a:rPr lang="ru-RU" sz="2000" dirty="0"/>
               <a:t>Задачи практики:</a:t>
             </a:r>
           </a:p>
@@ -5671,7 +5671,7 @@
               </a:spcBef>
             </a:pPr>
             <a:r>
-              <a:rPr lang="ru-RU" sz="1800" dirty="0"/>
+              <a:rPr lang="ru-RU" sz="2000" dirty="0"/>
               <a:t>Описание средств и технологий разработки</a:t>
             </a:r>
           </a:p>
@@ -5685,8 +5685,16 @@
               </a:spcBef>
             </a:pPr>
             <a:r>
-              <a:rPr lang="ru-RU" sz="1800" dirty="0"/>
-              <a:t>Проработка видов обеспечения: информационное, программное, алгоритмическое, математическое, техническое</a:t>
+              <a:rPr lang="ru-RU" sz="2000" dirty="0"/>
+              <a:t>Проработка видов обеспечения: информационное, программное</a:t>
+            </a:r>
+            <a:r>
+              <a:rPr lang="ru-RU" sz="2000"/>
+              <a:t>, алгоритмическое, </a:t>
+            </a:r>
+            <a:r>
+              <a:rPr lang="ru-RU" sz="2000" dirty="0"/>
+              <a:t>техническое</a:t>
             </a:r>
           </a:p>
           <a:p>
@@ -5699,7 +5707,7 @@
               </a:spcBef>
             </a:pPr>
             <a:r>
-              <a:rPr lang="ru-RU" sz="1800" dirty="0"/>
+              <a:rPr lang="ru-RU" sz="2000" dirty="0"/>
               <a:t>Реализация модуля анализа лица и эмоций</a:t>
             </a:r>
           </a:p>
@@ -5713,7 +5721,7 @@
               </a:spcBef>
             </a:pPr>
             <a:r>
-              <a:rPr lang="ru-RU" sz="1800" dirty="0"/>
+              <a:rPr lang="ru-RU" sz="2000" dirty="0"/>
               <a:t>Реализация модуля распознавания речи</a:t>
             </a:r>
           </a:p>
@@ -5727,7 +5735,7 @@
               </a:spcBef>
             </a:pPr>
             <a:r>
-              <a:rPr lang="ru-RU" sz="1800" dirty="0"/>
+              <a:rPr lang="ru-RU" sz="2000" dirty="0"/>
               <a:t>Разработка пользовательского интерфейса ПО</a:t>
             </a:r>
           </a:p>
@@ -5741,7 +5749,7 @@
               </a:spcBef>
             </a:pPr>
             <a:r>
-              <a:rPr lang="ru-RU" sz="1800" dirty="0"/>
+              <a:rPr lang="ru-RU" sz="2000" dirty="0"/>
               <a:t>Интеграция модулей ИИ в единую систему</a:t>
             </a:r>
           </a:p>
@@ -5755,7 +5763,7 @@
               </a:spcBef>
             </a:pPr>
             <a:r>
-              <a:rPr lang="ru-RU" sz="1800" dirty="0"/>
+              <a:rPr lang="ru-RU" sz="2000" dirty="0"/>
               <a:t>Подготовить отчёт по преддипломной практике</a:t>
             </a:r>
           </a:p>
@@ -6368,15 +6376,16 @@
         </p:spPr>
         <p:txBody>
           <a:bodyPr>
-            <a:normAutofit fontScale="92500" lnSpcReduction="20000"/>
+            <a:normAutofit fontScale="92500" lnSpcReduction="10000"/>
           </a:bodyPr>
           <a:lstStyle/>
           <a:p>
             <a:pPr algn="just"/>
             <a:r>
               <a:rPr lang="ru-RU" dirty="0"/>
-              <a:t>Искусственный интеллект (ИИ) – раздел информатики, занимающийся созданием систем, способных выполнять задачи, требующие человеческого интеллекта: распознавание образов, понимание естественного языка и принятие решений на основе данных.</a:t>
-            </a:r>
+              <a:t>Искусственный интеллект (ИИ) — это направление компьютерных наук, нацеленное на создание систем, способных выполнять задачи, требующие человеческого интеллекта.</a:t>
+            </a:r>
+            <a:endParaRPr lang="en-US" dirty="0"/>
           </a:p>
           <a:p>
             <a:pPr algn="just"/>
@@ -6496,7 +6505,7 @@
               <a:buNone/>
             </a:pPr>
             <a:r>
-              <a:rPr lang="ru-RU" sz="1800" dirty="0"/>
+              <a:rPr lang="ru-RU" sz="2400" dirty="0"/>
               <a:t>Основные этапы работы модуля:</a:t>
             </a:r>
           </a:p>
@@ -6506,7 +6515,7 @@
               <a:buChar char="•"/>
             </a:pPr>
             <a:r>
-              <a:rPr lang="ru-RU" sz="1800" dirty="0"/>
+              <a:rPr lang="ru-RU" sz="2400" dirty="0"/>
               <a:t>захват кадров с веб-камеры через браузерные API; </a:t>
             </a:r>
           </a:p>
@@ -6516,7 +6525,7 @@
               <a:buChar char="•"/>
             </a:pPr>
             <a:r>
-              <a:rPr lang="ru-RU" sz="1800" dirty="0"/>
+              <a:rPr lang="ru-RU" sz="2400" dirty="0"/>
               <a:t>детекция и локализация лица на изображении; </a:t>
             </a:r>
           </a:p>
@@ -6526,7 +6535,7 @@
               <a:buChar char="•"/>
             </a:pPr>
             <a:r>
-              <a:rPr lang="ru-RU" sz="1800" dirty="0"/>
+              <a:rPr lang="ru-RU" sz="2400" dirty="0"/>
               <a:t>выравнивание и нормализация области лица; </a:t>
             </a:r>
           </a:p>
@@ -6536,15 +6545,15 @@
               <a:buChar char="•"/>
             </a:pPr>
             <a:r>
-              <a:rPr lang="ru-RU" sz="1800" dirty="0"/>
+              <a:rPr lang="ru-RU" sz="2400" dirty="0"/>
               <a:t>извлечение признаков с использованием </a:t>
             </a:r>
             <a:r>
-              <a:rPr lang="ru-RU" sz="1800" dirty="0" err="1"/>
+              <a:rPr lang="ru-RU" sz="2400" dirty="0" err="1"/>
               <a:t>предобученных</a:t>
             </a:r>
             <a:r>
-              <a:rPr lang="ru-RU" sz="1800" dirty="0"/>
+              <a:rPr lang="ru-RU" sz="2400" dirty="0"/>
               <a:t> CNN-моделей; </a:t>
             </a:r>
           </a:p>
@@ -6554,7 +6563,7 @@
               <a:buChar char="•"/>
             </a:pPr>
             <a:r>
-              <a:rPr lang="ru-RU" sz="1800" dirty="0"/>
+              <a:rPr lang="ru-RU" sz="2400" dirty="0"/>
               <a:t>классификация эмоционального состояния; </a:t>
             </a:r>
           </a:p>
@@ -6564,15 +6573,15 @@
               <a:buChar char="•"/>
             </a:pPr>
             <a:r>
-              <a:rPr lang="ru-RU" sz="1800" dirty="0"/>
+              <a:rPr lang="ru-RU" sz="2400" dirty="0"/>
               <a:t>передача результатов аналитики в систему через </a:t>
             </a:r>
             <a:r>
-              <a:rPr lang="ru-RU" sz="1800" dirty="0" err="1"/>
+              <a:rPr lang="ru-RU" sz="2400" dirty="0" err="1"/>
               <a:t>WebSocket</a:t>
             </a:r>
             <a:r>
-              <a:rPr lang="ru-RU" sz="1800" dirty="0"/>
+              <a:rPr lang="ru-RU" sz="2400" dirty="0"/>
               <a:t>. </a:t>
             </a:r>
           </a:p>
@@ -6581,7 +6590,7 @@
               <a:buNone/>
             </a:pPr>
             <a:r>
-              <a:rPr lang="ru-RU" sz="1800" dirty="0"/>
+              <a:rPr lang="ru-RU" sz="2400" dirty="0"/>
               <a:t>Дополнительно система поддерживает:</a:t>
             </a:r>
           </a:p>
@@ -6591,7 +6600,7 @@
               <a:buChar char="•"/>
             </a:pPr>
             <a:r>
-              <a:rPr lang="ru-RU" sz="1800" dirty="0"/>
+              <a:rPr lang="ru-RU" sz="2400" dirty="0"/>
               <a:t>обработку нескольких лиц одновременно; </a:t>
             </a:r>
           </a:p>
@@ -6601,7 +6610,7 @@
               <a:buChar char="•"/>
             </a:pPr>
             <a:r>
-              <a:rPr lang="ru-RU" sz="1800" dirty="0"/>
+              <a:rPr lang="ru-RU" sz="2400" dirty="0"/>
               <a:t>отслеживание изменений эмоций во времени; </a:t>
             </a:r>
           </a:p>
@@ -6611,7 +6620,7 @@
               <a:buChar char="•"/>
             </a:pPr>
             <a:r>
-              <a:rPr lang="ru-RU" sz="1800" dirty="0"/>
+              <a:rPr lang="ru-RU" sz="2400" dirty="0"/>
               <a:t>агрегацию результатов в аналитические события и отчёты.</a:t>
             </a:r>
           </a:p>
@@ -6739,79 +6748,89 @@
           </a:bodyPr>
           <a:lstStyle/>
           <a:p>
+            <a:pPr algn="just"/>
+            <a:r>
+              <a:rPr lang="ru-RU" sz="2400" dirty="0"/>
+              <a:t>MTCNN (Multi-</a:t>
+            </a:r>
+            <a:r>
+              <a:rPr lang="ru-RU" sz="2400" dirty="0" err="1"/>
+              <a:t>task</a:t>
+            </a:r>
+            <a:r>
+              <a:rPr lang="ru-RU" sz="2400" dirty="0"/>
+              <a:t> </a:t>
+            </a:r>
+            <a:r>
+              <a:rPr lang="ru-RU" sz="2400" dirty="0" err="1"/>
+              <a:t>Cascaded</a:t>
+            </a:r>
+            <a:r>
+              <a:rPr lang="ru-RU" sz="2400" dirty="0"/>
+              <a:t> CNN) – каскадная архитектура из трёх сетей, последовательно уточняющих положение лица и определяющих 5 ключевых точек. Обеспечивает высокую скорость детекции при сохранении точности даже при частичных перекрытиях.</a:t>
+            </a:r>
+          </a:p>
+          <a:p>
+            <a:pPr algn="just"/>
+            <a:r>
+              <a:rPr lang="ru-RU" sz="2400" dirty="0" err="1"/>
+              <a:t>DeepFace</a:t>
+            </a:r>
+            <a:r>
+              <a:rPr lang="ru-RU" sz="2400" dirty="0"/>
+              <a:t> – мета-библиотека, предоставляющая доступ к </a:t>
+            </a:r>
+            <a:r>
+              <a:rPr lang="ru-RU" sz="2400" dirty="0" err="1"/>
+              <a:t>предобученным</a:t>
+            </a:r>
+            <a:r>
+              <a:rPr lang="ru-RU" sz="2400" dirty="0"/>
+              <a:t> моделям (VGG-Face, Facenet512, </a:t>
+            </a:r>
+            <a:r>
+              <a:rPr lang="ru-RU" sz="2400" dirty="0" err="1"/>
+              <a:t>EfficientNet</a:t>
+            </a:r>
+            <a:r>
+              <a:rPr lang="ru-RU" sz="2400" dirty="0"/>
+              <a:t>). Позволяет гибко выбирать архитектуру в зависимости от требований к точности и вычислительной нагрузке.</a:t>
+            </a:r>
+          </a:p>
+          <a:p>
+            <a:pPr algn="just"/>
+            <a:r>
+              <a:rPr lang="ru-RU" sz="2400" dirty="0" err="1"/>
+              <a:t>OpenCV</a:t>
+            </a:r>
+            <a:r>
+              <a:rPr lang="ru-RU" sz="2400" dirty="0"/>
+              <a:t> – библиотека компьютерного зрения, используемая для предобработки кадров, изменения размера, конвертации форматов и наложения результатов анализа на видеопоток в реальном времени.</a:t>
+            </a:r>
+          </a:p>
+          <a:p>
             <a:pPr marL="0" indent="0" algn="just">
               <a:buNone/>
             </a:pPr>
             <a:r>
-              <a:rPr lang="ru-RU" sz="1800" dirty="0"/>
-              <a:t>MTCNN (Multi-</a:t>
-            </a:r>
-            <a:r>
-              <a:rPr lang="ru-RU" sz="1800" dirty="0" err="1"/>
-              <a:t>task</a:t>
-            </a:r>
-            <a:r>
-              <a:rPr lang="ru-RU" sz="1800" dirty="0"/>
+              <a:rPr lang="ru-RU" sz="2400" dirty="0"/>
+              <a:t>Комбинация данных инструментов реализует последовательный </a:t>
+            </a:r>
+            <a:r>
+              <a:rPr lang="ru-RU" sz="2400" dirty="0" err="1"/>
+              <a:t>pipeline</a:t>
+            </a:r>
+            <a:r>
+              <a:rPr lang="ru-RU" sz="2400" dirty="0"/>
               <a:t> </a:t>
             </a:r>
             <a:r>
-              <a:rPr lang="ru-RU" sz="1800" dirty="0" err="1"/>
-              <a:t>Cascaded</a:t>
-            </a:r>
-            <a:r>
-              <a:rPr lang="ru-RU" sz="1800" dirty="0"/>
-              <a:t> CNN) – каскадная архитектура из трёх сетей, последовательно уточняющих положение лица и определяющих 5 ключевых точек. Обеспечивает высокую скорость детекции при сохранении точности &gt;95% даже при частичных перекрытиях.</a:t>
-            </a:r>
-          </a:p>
-          <a:p>
-            <a:pPr marL="0" indent="0" algn="just">
-              <a:buNone/>
-            </a:pPr>
-            <a:r>
-              <a:rPr lang="ru-RU" sz="1800" dirty="0" err="1"/>
-              <a:t>DeepFace</a:t>
-            </a:r>
-            <a:r>
-              <a:rPr lang="ru-RU" sz="1800" dirty="0"/>
-              <a:t> – мета-библиотека, предоставляющая доступ к </a:t>
-            </a:r>
-            <a:r>
-              <a:rPr lang="ru-RU" sz="1800" dirty="0" err="1"/>
-              <a:t>предобученным</a:t>
-            </a:r>
-            <a:r>
-              <a:rPr lang="ru-RU" sz="1800" dirty="0"/>
-              <a:t> моделям (VGG-Face, Facenet512, </a:t>
-            </a:r>
-            <a:r>
-              <a:rPr lang="ru-RU" sz="1800" dirty="0" err="1"/>
-              <a:t>EfficientNet</a:t>
-            </a:r>
-            <a:r>
-              <a:rPr lang="ru-RU" sz="1800" dirty="0"/>
-              <a:t>). Позволяет гибко выбирать архитектуру в зависимости от требований к точности и вычислительной нагрузке.</a:t>
-            </a:r>
-          </a:p>
-          <a:p>
-            <a:pPr marL="0" indent="0" algn="just">
-              <a:buNone/>
-            </a:pPr>
-            <a:r>
-              <a:rPr lang="ru-RU" sz="1800" dirty="0" err="1"/>
-              <a:t>OpenCV</a:t>
-            </a:r>
-            <a:r>
-              <a:rPr lang="ru-RU" sz="1800" dirty="0"/>
-              <a:t> – библиотека компьютерного зрения, используемая для предобработки кадров, изменения размера, конвертации форматов и наложения результатов анализа на видеопоток в реальном времени.</a:t>
-            </a:r>
-          </a:p>
-          <a:p>
-            <a:pPr marL="0" indent="0" algn="just">
-              <a:buNone/>
-            </a:pPr>
-            <a:r>
-              <a:rPr lang="ru-RU" sz="1800" dirty="0"/>
-              <a:t>Комбинация данных инструментов позволяет реализовать конвейер обработки: детекция → выравнивание → извлечение признаков → классификация, полностью автоматизированный на стороне AI-шлюза.</a:t>
+              <a:rPr lang="ru-RU" sz="2400" dirty="0" err="1"/>
+              <a:t>обработки:детекция</a:t>
+            </a:r>
+            <a:r>
+              <a:rPr lang="ru-RU" sz="2400" dirty="0"/>
+              <a:t> лица → выравнивание → извлечение признаков → классификация эмоций.</a:t>
             </a:r>
           </a:p>
         </p:txBody>
@@ -6928,13 +6947,13 @@
         </p:nvSpPr>
         <p:spPr>
           <a:xfrm>
-            <a:off x="838200" y="969118"/>
+            <a:off x="637032" y="839485"/>
             <a:ext cx="10515600" cy="5839612"/>
           </a:xfrm>
         </p:spPr>
         <p:txBody>
           <a:bodyPr>
-            <a:normAutofit/>
+            <a:noAutofit/>
           </a:bodyPr>
           <a:lstStyle/>
           <a:p>
@@ -6942,35 +6961,35 @@
               <a:buNone/>
             </a:pPr>
             <a:r>
-              <a:rPr lang="ru-RU" sz="1800" dirty="0"/>
+              <a:rPr lang="ru-RU" sz="2400" dirty="0"/>
               <a:t>Основные функции:</a:t>
             </a:r>
           </a:p>
           <a:p>
             <a:pPr algn="just"/>
             <a:r>
-              <a:rPr lang="ru-RU" sz="1800" dirty="0"/>
+              <a:rPr lang="ru-RU" sz="2400" dirty="0"/>
               <a:t>Захват видеопотока через браузерные API без установки дополнительных плагинов</a:t>
             </a:r>
           </a:p>
           <a:p>
             <a:pPr algn="just"/>
             <a:r>
-              <a:rPr lang="ru-RU" sz="1800" dirty="0"/>
+              <a:rPr lang="ru-RU" sz="2400" dirty="0"/>
               <a:t>Детекция лиц и классификация базовых эмоций в реальном времени</a:t>
             </a:r>
           </a:p>
           <a:p>
             <a:pPr algn="just"/>
             <a:r>
-              <a:rPr lang="ru-RU" sz="1800" dirty="0"/>
+              <a:rPr lang="ru-RU" sz="2400" dirty="0"/>
               <a:t>Отслеживание изменения эмоционального состояния в течение сессии с фиксацией временных меток</a:t>
             </a:r>
           </a:p>
           <a:p>
             <a:pPr algn="just"/>
             <a:r>
-              <a:rPr lang="ru-RU" sz="1800" dirty="0"/>
+              <a:rPr lang="ru-RU" sz="2400" dirty="0"/>
               <a:t>Адаптивная частота отправки кадров для балансировки нагрузки на сеть и сервер</a:t>
             </a:r>
           </a:p>
@@ -6979,28 +6998,28 @@
               <a:buNone/>
             </a:pPr>
             <a:r>
-              <a:rPr lang="ru-RU" sz="1800" dirty="0"/>
+              <a:rPr lang="ru-RU" sz="2400" dirty="0"/>
               <a:t>Дополнительные функции:</a:t>
             </a:r>
           </a:p>
           <a:p>
             <a:pPr algn="just"/>
             <a:r>
-              <a:rPr lang="ru-RU" sz="1800" dirty="0"/>
+              <a:rPr lang="ru-RU" sz="2400" dirty="0"/>
               <a:t>Вычисление метрик вовлечённости на основе частоты и интенсивности эмоциональных проявлений</a:t>
             </a:r>
           </a:p>
           <a:p>
             <a:pPr algn="just"/>
             <a:r>
-              <a:rPr lang="ru-RU" sz="1800" dirty="0"/>
+              <a:rPr lang="ru-RU" sz="2400" dirty="0"/>
               <a:t>Фильтрация ложных срабатываний при отсутствии лиц в кадре или при низком качестве освещения</a:t>
             </a:r>
           </a:p>
           <a:p>
             <a:pPr algn="just"/>
             <a:r>
-              <a:rPr lang="ru-RU" sz="1800" dirty="0"/>
+              <a:rPr lang="ru-RU" sz="2400" dirty="0"/>
               <a:t>Экспорт сырых данных анализа в формате JSON для последующей агрегации в отчётах</a:t>
             </a:r>
           </a:p>
@@ -7132,7 +7151,7 @@
               <a:buNone/>
             </a:pPr>
             <a:r>
-              <a:rPr lang="ru-RU" sz="1800" dirty="0"/>
+              <a:rPr lang="ru-RU" sz="2400" dirty="0"/>
               <a:t>Основные функции:</a:t>
             </a:r>
           </a:p>
@@ -7141,7 +7160,7 @@
               <a:buNone/>
             </a:pPr>
             <a:r>
-              <a:rPr lang="ru-RU" sz="1800" dirty="0"/>
+              <a:rPr lang="ru-RU" sz="2400" dirty="0"/>
               <a:t>• Захват аудиопотока с микрофона в режиме реального времени</a:t>
             </a:r>
           </a:p>
@@ -7150,7 +7169,7 @@
               <a:buNone/>
             </a:pPr>
             <a:r>
-              <a:rPr lang="ru-RU" sz="1800" dirty="0"/>
+              <a:rPr lang="ru-RU" sz="2400" dirty="0"/>
               <a:t>• Преобразование речевого сигнала в текстовое представление</a:t>
             </a:r>
           </a:p>
@@ -7159,7 +7178,7 @@
               <a:buNone/>
             </a:pPr>
             <a:r>
-              <a:rPr lang="ru-RU" sz="1800" dirty="0"/>
+              <a:rPr lang="ru-RU" sz="2400" dirty="0"/>
               <a:t>• Разделение реплик по участникам встречи с сохранением временных меток</a:t>
             </a:r>
           </a:p>
@@ -7168,15 +7187,15 @@
               <a:buNone/>
             </a:pPr>
             <a:r>
-              <a:rPr lang="ru-RU" sz="1800" dirty="0"/>
+              <a:rPr lang="ru-RU" sz="2400" dirty="0"/>
               <a:t>• Передача промежуточных и финальных результатов </a:t>
             </a:r>
             <a:r>
-              <a:rPr lang="ru-RU" sz="1800" dirty="0" err="1"/>
+              <a:rPr lang="ru-RU" sz="2400" dirty="0" err="1"/>
               <a:t>транскрибации</a:t>
             </a:r>
             <a:r>
-              <a:rPr lang="ru-RU" sz="1800" dirty="0"/>
+              <a:rPr lang="ru-RU" sz="2400" dirty="0"/>
               <a:t> в интерфейс</a:t>
             </a:r>
           </a:p>
@@ -7185,7 +7204,7 @@
               <a:buNone/>
             </a:pPr>
             <a:r>
-              <a:rPr lang="ru-RU" sz="1800" dirty="0"/>
+              <a:rPr lang="ru-RU" sz="2400" dirty="0"/>
               <a:t>Дополнительные функции:</a:t>
             </a:r>
           </a:p>
@@ -7194,7 +7213,7 @@
               <a:buNone/>
             </a:pPr>
             <a:r>
-              <a:rPr lang="ru-RU" sz="1800" dirty="0"/>
+              <a:rPr lang="ru-RU" sz="2400" dirty="0"/>
               <a:t>• Оценка уверенности распознавания и определение языка речи</a:t>
             </a:r>
           </a:p>
@@ -7203,7 +7222,7 @@
               <a:buNone/>
             </a:pPr>
             <a:r>
-              <a:rPr lang="ru-RU" sz="1800" dirty="0"/>
+              <a:rPr lang="ru-RU" sz="2400" dirty="0"/>
               <a:t>• Фильтрация фоновых шумов и адаптация к качеству аудиосигнала</a:t>
             </a:r>
           </a:p>
@@ -7212,7 +7231,7 @@
               <a:buNone/>
             </a:pPr>
             <a:r>
-              <a:rPr lang="ru-RU" sz="1800" dirty="0"/>
+              <a:rPr lang="ru-RU" sz="2400" dirty="0"/>
               <a:t>• Экспорт текстовых данных для последующей агрегации в аналитических отчётах</a:t>
             </a:r>
           </a:p>
